--- a/PythonBasics/Unit4/L4 Demos.pptx
+++ b/PythonBasics/Unit4/L4 Demos.pptx
@@ -243,10 +243,10 @@
                   <c:v>0.17</c:v>
                 </c:pt>
                 <c:pt idx="1">
-                  <c:v>0.18</c:v>
+                  <c:v>0.16</c:v>
                 </c:pt>
                 <c:pt idx="2">
-                  <c:v>0.81</c:v>
+                  <c:v>0.63</c:v>
                 </c:pt>
               </c:numCache>
             </c:numRef>
@@ -1000,7 +1000,7 @@
           <a:p>
             <a:r>
               <a:rPr lang="en-US" dirty="0"/>
-              <a:t>Top row: what each stage hands to the next. Bottom: the three nested loops explain the runtime. 50 generations of 50 tournaments is 2,500 evaluations, plus 50 for the initial population, each 4 trials of 200 steps, about 2 million sense-think-move steps, about 13 seconds on a laptop.</a:t>
+              <a:t>Top row: what each stage hands to the next. Bottom: the three nested loops explain the runtime. 100 generations of 50 tournaments is 5,000 evaluations, plus 50 for the initial population, each 4 trials of 200 steps, about 4 million sense-think-move steps, about 35 seconds on a laptop.</a:t>
             </a:r>
             <a:endParaRPr lang="en-US" dirty="0"/>
           </a:p>
@@ -1176,7 +1176,7 @@
           <a:p>
             <a:r>
               <a:rPr lang="en-US" dirty="0"/>
-              <a:t>Numbers are from one seeded run (np.random.seed(3)); eight seeds gave 0.77 to 0.86. Never moves: 1/(1+5) = 0.167. Random genomes averaged over 150 draws: 0.18. Evolved: 0.81 on 200 fresh single trials. Your run will differ. Motor outputs are not bounded in this version, so there is no fixed speed limit.</a:t>
+              <a:t>Numbers are from one seeded run (np.random.seed(3)); eight seeds gave fresh fitness 0.56 to 0.66. Never moves: 1/(1+5) = 0.167. Random genomes averaged over 150 draws: 0.16. Evolved: 0.63 on 200 fresh single trials. Top speed is velgain = 0.1 per step, so a straight dash at full speed needs 50 steps and would score about 0.84 (my estimate), so 0.63 is about three quarters of that. Your run will differ.</a:t>
             </a:r>
             <a:endParaRPr lang="en-US" dirty="0"/>
           </a:p>
@@ -1264,7 +1264,7 @@
           <a:p>
             <a:r>
               <a:rPr lang="en-US" dirty="0"/>
-              <a:t>Microbial computes a fitness once, when an individual is created or changed, and never re-scores it. Random starts and noise make that score a sample, and selection can favor lucky samples, so the best curve never goes down and could overstate. Here it did not: over eight seeds the recorded and fresh fitness differ by at most 0.02, because the evolved controller works from every start. The check is cheap, so always do it. In the official EvoTorch version parents are re-scored every generation.</a:t>
+              <a:t>Microbial computes a fitness once, when an individual is created or changed, and never re-scores it. Random starts and noise make that score a sample, and selection can favor lucky samples, so the best curve never goes down and could overstate. Over eight seeds the recorded fitness beat the fresh fitness by 0.02 on average and by up to 0.05 (seed 8: 0.62 vs 0.57), so it is a little optimistic. The check is cheap, so always do it. In the official EvoTorch version parents are re-scored every generation.</a:t>
             </a:r>
             <a:endParaRPr lang="en-US" dirty="0"/>
           </a:p>
@@ -1440,7 +1440,7 @@
           <a:p>
             <a:r>
               <a:rPr lang="en-US" dirty="0"/>
-              <a:t>Figure comes from sim.py and viz.py on the seeded run (seed 3, fitness 0.81). All 20 trials are within distance 1 of the light by step 40 and stay there; 300 more fresh trials also all arrive. Ask what limits fitness now (travel time), why all trajectories look alike, and what changes at a larger distance or shorter duration.</a:t>
+              <a:t>Figure comes from sim.py and viz.py on the seeded run (seed 3). 19 of 20 trials end within distance 1 of the light, most by step 60 to 100; one drives away and never returns. Over 300 fresh trials 99 percent arrive. Motors are capped to [0, 1], so the vehicle cannot reverse: ask students whether that explains the failed start, and how they would test it.</a:t>
             </a:r>
             <a:endParaRPr lang="en-US" dirty="0"/>
           </a:p>
@@ -1792,7 +1792,7 @@
           <a:p>
             <a:r>
               <a:rPr lang="en-US" dirty="0"/>
-              <a:t>Brief. The light sits at the origin and the vehicle starts on a circle of radius 5 around it, random heading. Point out that think() is one line: the whole brain is the controller object. Code is trimmed from env.py.</a:t>
+              <a:t>Brief. The light sits at the origin and the vehicle starts on a circle of radius 5 around it, random heading. Point out that think() is one call: the whole brain is the controller object, and its outputs are capped to [0, 1], like the sensors. Without the cap, evolution finds motor values of plus or minus 10 that make the vehicle spin and jitter every step. Code is trimmed from env.py.</a:t>
             </a:r>
             <a:endParaRPr lang="en-US" dirty="0"/>
           </a:p>
@@ -1880,7 +1880,7 @@
           <a:p>
             <a:r>
               <a:rPr lang="en-US" dirty="0"/>
-              <a:t>This is eas.Microbial, the same file as Unit 3. Each tournament changes one individual. A generation is popsize tournaments, so 50 generations is 2,500 tournaments and 2,500 fitness evaluations. Point out that only the loser is re-scored.</a:t>
+              <a:t>This is eas.Microbial, the same file as Unit 3. Each tournament changes one individual. A generation is popsize tournaments, so 100 generations is 5,000 tournaments and 5,000 fitness evaluations. Point out that only the loser is re-scored.</a:t>
             </a:r>
             <a:endParaRPr lang="en-US" dirty="0"/>
           </a:p>
@@ -1968,7 +1968,7 @@
           <a:p>
             <a:r>
               <a:rPr lang="en-US" dirty="0"/>
-              <a:t>fnn.py setParams slices the genotype: weights, then biases, then activation genes. Genes in [-1,1] are multiplied by weightrange=5. Genome size is 16 weights + 6 biases + 10 activation genes = 32. For each layer, the argmax of its 5 activation genes picks sigmoid, tanh, relu, linear or gaussian, so the network evolves its own activation functions. Output activations are not forced to be bounded.</a:t>
+              <a:t>fnn.py setParams slices the genotype: weights, then biases, then activation genes. Genes in [-1,1] are multiplied by weightrange=5. Genome size is 16 weights + 6 biases + 10 activation genes = 32. For each layer, the argmax of its 5 activation genes picks sigmoid, tanh, relu, linear or gaussian, so the network evolves its own activation functions. The motor outputs are then capped to [0, 1] in env.py think().</a:t>
             </a:r>
             <a:endParaRPr lang="en-US" dirty="0"/>
           </a:p>
@@ -4986,7 +4986,7 @@
                 <a:ea typeface="IBM Plex Sans" pitchFamily="34" charset="-122"/>
                 <a:cs typeface="IBM Plex Sans" pitchFamily="34" charset="-120"/>
               </a:rPr>
-              <a:t>50 × 50</a:t>
+              <a:t>100 × 50</a:t>
             </a:r>
             <a:endParaRPr lang="en-US" sz="2800" dirty="0"/>
           </a:p>
@@ -5064,7 +5064,7 @@
                 <a:ea typeface="IBM Plex Sans" pitchFamily="34" charset="-122"/>
                 <a:cs typeface="IBM Plex Sans" pitchFamily="34" charset="-120"/>
               </a:rPr>
-              <a:t>each tournament scores one new individual: 2,500 evaluations</a:t>
+              <a:t>each tournament scores one new individual: 5,000 evaluations</a:t>
             </a:r>
             <a:endParaRPr lang="en-US" sz="1200" dirty="0"/>
           </a:p>
@@ -5337,7 +5337,7 @@
                 <a:ea typeface="IBM Plex Sans" pitchFamily="34" charset="-122"/>
                 <a:cs typeface="IBM Plex Sans" pitchFamily="34" charset="-120"/>
               </a:rPr>
-              <a:t>About 2 million sense-think-move steps, in plain Python, in roughly 13 seconds.</a:t>
+              <a:t>About 4 million sense-think-move steps, in plain Python, in roughly 35 seconds.</a:t>
             </a:r>
             <a:endParaRPr lang="en-US" sz="1400" dirty="0"/>
           </a:p>
@@ -6617,7 +6617,7 @@
                 <a:ea typeface="IBM Plex Sans" pitchFamily="34" charset="-122"/>
                 <a:cs typeface="IBM Plex Sans" pitchFamily="34" charset="-120"/>
               </a:rPr>
-              <a:t>Travel time costs points: </a:t>
+              <a:t>Start 5 away, top speed 0.1 per step: </a:t>
             </a:r>
             <a:pPr indent="0" marL="0">
               <a:spcAft>
@@ -6634,7 +6634,7 @@
                 <a:ea typeface="IBM Plex Sans" pitchFamily="34" charset="-122"/>
                 <a:cs typeface="IBM Plex Sans" pitchFamily="34" charset="-120"/>
               </a:rPr>
-              <a:t>the vehicle starts 5 away, so the early steps score low even for a perfect driver.</a:t>
+              <a:t>at least 50 of 200 steps are spent travelling. A perfect straight dash would score about 0.84.</a:t>
             </a:r>
             <a:endParaRPr lang="en-US" sz="1300" dirty="0"/>
           </a:p>
@@ -6710,7 +6710,7 @@
                 <a:ea typeface="IBM Plex Sans" pitchFamily="34" charset="-122"/>
                 <a:cs typeface="IBM Plex Sans" pitchFamily="34" charset="-120"/>
               </a:rPr>
-              <a:t>of evolve.py gave 0.77 to 0.86.</a:t>
+              <a:t>of evolve.py gave 0.56 to 0.66.</a:t>
             </a:r>
             <a:endParaRPr lang="en-US" sz="1300" dirty="0"/>
           </a:p>
@@ -6859,7 +6859,7 @@
                 <a:ea typeface="IBM Plex Sans" pitchFamily="34" charset="-122"/>
                 <a:cs typeface="IBM Plex Sans" pitchFamily="34" charset="-120"/>
               </a:rPr>
-              <a:t>Can we trust the recorded fitness?</a:t>
+              <a:t>The recorded fitness runs a bit high</a:t>
             </a:r>
             <a:endParaRPr lang="en-US" sz="3200" dirty="0"/>
           </a:p>
@@ -7088,7 +7088,7 @@
                 <a:ea typeface="IBM Plex Sans" pitchFamily="34" charset="-122"/>
                 <a:cs typeface="IBM Plex Sans" pitchFamily="34" charset="-120"/>
               </a:rPr>
-              <a:t>It held up here.</a:t>
+              <a:t>Slightly optimistic.</a:t>
             </a:r>
             <a:endParaRPr lang="en-US" sz="1300" dirty="0"/>
           </a:p>
@@ -7108,7 +7108,7 @@
                 <a:ea typeface="IBM Plex Sans" pitchFamily="34" charset="-122"/>
                 <a:cs typeface="IBM Plex Sans" pitchFamily="34" charset="-120"/>
               </a:rPr>
-              <a:t>Over 8 seeds, recorded and fresh fitness differ by at most 0.02. Trial-to-trial spread is under 0.01. Try reps = 1 or fewer generations: does the gap grow?</a:t>
+              <a:t>Over 8 seeds, recorded beats fresh by 0.02 on average, up to 0.05. Single trials of one genotype ranged from 0.44 to 0.68. Try reps = 1: does the gap grow?</a:t>
             </a:r>
             <a:endParaRPr lang="en-US" sz="1300" dirty="0"/>
           </a:p>
@@ -7147,7 +7147,7 @@
                 <a:ea typeface="JetBrains Mono" pitchFamily="34" charset="-122"/>
                 <a:cs typeface="JetBrains Mono" pitchFamily="34" charset="-120"/>
               </a:rPr>
-              <a:t>seed 3 · dashed line: 200 fresh single trials · 8 seeds compared: recorded 0.77 to 0.84, fresh 0.77 to 0.86</a:t>
+              <a:t>seed 3 · dashed line: 200 fresh single trials · 8 seeds: recorded 0.55 to 0.70, fresh 0.56 to 0.66</a:t>
             </a:r>
             <a:endParaRPr lang="en-US" sz="1000" dirty="0"/>
           </a:p>
@@ -7355,7 +7355,7 @@
                 <a:ea typeface="JetBrains Mono" pitchFamily="34" charset="-122"/>
                 <a:cs typeface="JetBrains Mono" pitchFamily="34" charset="-120"/>
               </a:rPr>
-              <a:t># 1. evolve (about 15 s): prints recorded and fresh fitness</a:t>
+              <a:t># 1. evolve (about 30 s): prints recorded and fresh fitness</a:t>
             </a:r>
             <a:endParaRPr lang="en-US" sz="1100" dirty="0"/>
           </a:p>
@@ -7963,7 +7963,7 @@
                 <a:ea typeface="IBM Plex Sans" pitchFamily="34" charset="-122"/>
                 <a:cs typeface="IBM Plex Sans" pitchFamily="34" charset="-120"/>
               </a:rPr>
-              <a:t>Every start reaches the light</a:t>
+              <a:t>Smooth paths, and nearly every start arrives</a:t>
             </a:r>
             <a:endParaRPr lang="en-US" sz="3200" dirty="0"/>
           </a:p>
@@ -8030,7 +8030,7 @@
                 <a:ea typeface="IBM Plex Sans" pitchFamily="34" charset="-122"/>
                 <a:cs typeface="IBM Plex Sans" pitchFamily="34" charset="-120"/>
               </a:rPr>
-              <a:t>20 of 20 trials </a:t>
+              <a:t>19 of 20 trials </a:t>
             </a:r>
             <a:pPr indent="0" marL="0">
               <a:spcAft>
@@ -8047,7 +8047,7 @@
                 <a:ea typeface="IBM Plex Sans" pitchFamily="34" charset="-122"/>
                 <a:cs typeface="IBM Plex Sans" pitchFamily="34" charset="-120"/>
               </a:rPr>
-              <a:t>arrive by step 40 and stay at the light.</a:t>
+              <a:t>arrive, most by step 60 to 100, and stay.</a:t>
             </a:r>
             <a:endParaRPr lang="en-US" sz="1300" dirty="0"/>
           </a:p>
@@ -8068,7 +8068,7 @@
                 <a:ea typeface="IBM Plex Sans" pitchFamily="34" charset="-122"/>
                 <a:cs typeface="IBM Plex Sans" pitchFamily="34" charset="-120"/>
               </a:rPr>
-              <a:t>Nearly straight paths, </a:t>
+              <a:t>Smooth curved paths, </a:t>
             </a:r>
             <a:pPr indent="0" marL="0">
               <a:spcAft>
@@ -8085,7 +8085,7 @@
                 <a:ea typeface="IBM Plex Sans" pitchFamily="34" charset="-122"/>
                 <a:cs typeface="IBM Plex Sans" pitchFamily="34" charset="-120"/>
               </a:rPr>
-              <a:t>jittered by motion noise.</a:t>
+              <a:t>with only small wiggles from motion noise.</a:t>
             </a:r>
             <a:endParaRPr lang="en-US" sz="1300" dirty="0"/>
           </a:p>
@@ -8106,7 +8106,7 @@
                 <a:ea typeface="IBM Plex Sans" pitchFamily="34" charset="-122"/>
                 <a:cs typeface="IBM Plex Sans" pitchFamily="34" charset="-120"/>
               </a:rPr>
-              <a:t>300 more fresh trials: </a:t>
+              <a:t>One start fails: </a:t>
             </a:r>
             <a:pPr indent="0" marL="0">
               <a:spcAft>
@@ -8123,7 +8123,7 @@
                 <a:ea typeface="IBM Plex Sans" pitchFamily="34" charset="-122"/>
                 <a:cs typeface="IBM Plex Sans" pitchFamily="34" charset="-120"/>
               </a:rPr>
-              <a:t>all arrive.</a:t>
+              <a:t>it drives away. 300 fresh trials: 99% arrive.</a:t>
             </a:r>
             <a:endParaRPr lang="en-US" sz="1300" dirty="0"/>
           </a:p>
@@ -8212,7 +8212,7 @@
                 <a:ea typeface="IBM Plex Sans" pitchFamily="34" charset="-122"/>
                 <a:cs typeface="IBM Plex Sans" pitchFamily="34" charset="-120"/>
               </a:rPr>
-              <a:t>Fitness is 0.81, so what limits it now? Why do the paths all look alike? Would it still work from distance 10, or with duration 100?</a:t>
+              <a:t>Why does one start fail? Motors cannot reverse now, so what could evolution do about a start facing away? More trials, more generations?</a:t>
             </a:r>
             <a:endParaRPr lang="en-US" sz="1300" dirty="0"/>
           </a:p>
@@ -12937,6 +12937,40 @@
                 <a:ea typeface="IBM Plex Sans" pitchFamily="34" charset="-122"/>
                 <a:cs typeface="IBM Plex Sans" pitchFamily="34" charset="-120"/>
               </a:rPr>
+              <a:t>, and motors are capped to </a:t>
+            </a:r>
+            <a:pPr indent="0" marL="0">
+              <a:spcAft>
+                <a:spcPts val="800"/>
+              </a:spcAft>
+              <a:buNone/>
+            </a:pPr>
+            <a:r>
+              <a:rPr lang="en-US" sz="1300" b="1" dirty="0">
+                <a:solidFill>
+                  <a:srgbClr val="16213A"/>
+                </a:solidFill>
+                <a:latin typeface="IBM Plex Sans" pitchFamily="34" charset="0"/>
+                <a:ea typeface="IBM Plex Sans" pitchFamily="34" charset="-122"/>
+                <a:cs typeface="IBM Plex Sans" pitchFamily="34" charset="-120"/>
+              </a:rPr>
+              <a:t>[0, 1]</a:t>
+            </a:r>
+            <a:pPr indent="0" marL="0">
+              <a:spcAft>
+                <a:spcPts val="800"/>
+              </a:spcAft>
+              <a:buNone/>
+            </a:pPr>
+            <a:r>
+              <a:rPr lang="en-US" sz="1300" dirty="0">
+                <a:solidFill>
+                  <a:srgbClr val="3E4A5C"/>
+                </a:solidFill>
+                <a:latin typeface="IBM Plex Sans" pitchFamily="34" charset="0"/>
+                <a:ea typeface="IBM Plex Sans" pitchFamily="34" charset="-122"/>
+                <a:cs typeface="IBM Plex Sans" pitchFamily="34" charset="-120"/>
+              </a:rPr>
               <a:t>.</a:t>
             </a:r>
             <a:endParaRPr lang="en-US" sz="1300" dirty="0"/>
@@ -13106,7 +13140,27 @@
                 <a:ea typeface="JetBrains Mono" pitchFamily="34" charset="-122"/>
                 <a:cs typeface="JetBrains Mono" pitchFamily="34" charset="-120"/>
               </a:rPr>
-              <a:t>    self.motors = self.controller.forward(self.sensors)[0]</a:t>
+              <a:t>    self.motors = np.clip(</a:t>
+            </a:r>
+            <a:endParaRPr lang="en-US" sz="1100" dirty="0"/>
+          </a:p>
+          <a:p>
+            <a:pPr indent="0" marL="0">
+              <a:spcAft>
+                <a:spcPts val="200"/>
+              </a:spcAft>
+              <a:buNone/>
+            </a:pPr>
+            <a:r>
+              <a:rPr lang="en-US" sz="1100" dirty="0">
+                <a:solidFill>
+                  <a:srgbClr val="F2A65A"/>
+                </a:solidFill>
+                <a:latin typeface="JetBrains Mono" pitchFamily="34" charset="0"/>
+                <a:ea typeface="JetBrains Mono" pitchFamily="34" charset="-122"/>
+                <a:cs typeface="JetBrains Mono" pitchFamily="34" charset="-120"/>
+              </a:rPr>
+              <a:t>        self.controller.forward(self.sensors)[0], 0, 1)</a:t>
             </a:r>
             <a:endParaRPr lang="en-US" sz="1100" dirty="0"/>
           </a:p>
@@ -14499,7 +14553,7 @@
                 <a:ea typeface="IBM Plex Sans" pitchFamily="34" charset="-122"/>
                 <a:cs typeface="IBM Plex Sans" pitchFamily="34" charset="-120"/>
               </a:rPr>
-              <a:t>50</a:t>
+              <a:t>100</a:t>
             </a:r>
             <a:endParaRPr lang="en-US" sz="2000" dirty="0"/>
           </a:p>
@@ -16195,7 +16249,7 @@
                 <a:ea typeface="IBM Plex Sans" pitchFamily="34" charset="-122"/>
                 <a:cs typeface="IBM Plex Sans" pitchFamily="34" charset="-120"/>
               </a:rPr>
-              <a:t>one per motor.</a:t>
+              <a:t>one per motor, capped to [0, 1] in think().</a:t>
             </a:r>
             <a:endParaRPr lang="en-US" sz="1300" dirty="0"/>
           </a:p>
@@ -16746,7 +16800,7 @@
                 <a:ea typeface="JetBrains Mono" pitchFamily="34" charset="-122"/>
                 <a:cs typeface="JetBrains Mono" pitchFamily="34" charset="-120"/>
               </a:rPr>
-              <a:t>    self.motors = self.controller.forward(</a:t>
+              <a:t>    self.motors = np.clip(self.controller.forward(</a:t>
             </a:r>
             <a:endParaRPr lang="en-US" sz="1100" dirty="0"/>
           </a:p>
@@ -16766,7 +16820,7 @@
                 <a:ea typeface="JetBrains Mono" pitchFamily="34" charset="-122"/>
                 <a:cs typeface="JetBrains Mono" pitchFamily="34" charset="-120"/>
               </a:rPr>
-              <a:t>                      self.sensors)[0]</a:t>
+              <a:t>                      self.sensors)[0], 0, 1)</a:t>
             </a:r>
             <a:endParaRPr lang="en-US" sz="1100" dirty="0"/>
           </a:p>
